--- a/NetBox/NetBox-总体集成架构-含MCP.pptx
+++ b/NetBox/NetBox-总体集成架构-含MCP.pptx
@@ -3077,8 +3077,8 @@
         </p:nvGrpSpPr>
         <p:grpSpPr>
           <a:xfrm>
-            <a:off x="365125" y="768350"/>
-            <a:ext cx="11043285" cy="5328285"/>
+            <a:off x="542290" y="1087755"/>
+            <a:ext cx="11075035" cy="5593715"/>
             <a:chOff x="575" y="1210"/>
             <a:chExt cx="18231" cy="8669"/>
           </a:xfrm>
@@ -3266,8 +3266,8 @@
           </p:nvSpPr>
           <p:spPr>
             <a:xfrm>
-              <a:off x="9101" y="1465"/>
-              <a:ext cx="1037" cy="204"/>
+              <a:off x="9101" y="1470"/>
+              <a:ext cx="1037" cy="194"/>
             </a:xfrm>
             <a:prstGeom prst="rect">
               <a:avLst/>
@@ -3325,8 +3325,8 @@
           </p:nvSpPr>
           <p:spPr>
             <a:xfrm>
-              <a:off x="8690" y="2909"/>
-              <a:ext cx="2074" cy="194"/>
+              <a:off x="8690" y="2913"/>
+              <a:ext cx="2074" cy="185"/>
             </a:xfrm>
             <a:prstGeom prst="rect">
               <a:avLst/>
@@ -3490,8 +3490,8 @@
           </p:nvSpPr>
           <p:spPr>
             <a:xfrm>
-              <a:off x="4493" y="3388"/>
-              <a:ext cx="749" cy="194"/>
+              <a:off x="4493" y="3392"/>
+              <a:ext cx="749" cy="185"/>
             </a:xfrm>
             <a:prstGeom prst="rect">
               <a:avLst/>
@@ -4308,8 +4308,8 @@
             </p:nvSpPr>
             <p:spPr>
               <a:xfrm>
-                <a:off x="7574" y="1718"/>
-                <a:ext cx="634" cy="238"/>
+                <a:off x="7574" y="1724"/>
+                <a:ext cx="634" cy="226"/>
               </a:xfrm>
               <a:prstGeom prst="rect">
                 <a:avLst/>
@@ -4349,8 +4349,8 @@
             </p:nvSpPr>
             <p:spPr>
               <a:xfrm>
-                <a:off x="8381" y="1464"/>
-                <a:ext cx="3341" cy="330"/>
+                <a:off x="8381" y="1472"/>
+                <a:ext cx="3341" cy="314"/>
               </a:xfrm>
               <a:prstGeom prst="rect">
                 <a:avLst/>
@@ -4391,7 +4391,7 @@
             <p:spPr>
               <a:xfrm>
                 <a:off x="8381" y="1793"/>
-                <a:ext cx="3341" cy="232"/>
+                <a:ext cx="3341" cy="443"/>
               </a:xfrm>
               <a:prstGeom prst="rect">
                 <a:avLst/>
@@ -4587,8 +4587,8 @@
               </p:nvSpPr>
               <p:spPr>
                 <a:xfrm>
-                  <a:off x="7574" y="3114"/>
-                  <a:ext cx="634" cy="238"/>
+                  <a:off x="7574" y="3120"/>
+                  <a:ext cx="634" cy="226"/>
                 </a:xfrm>
                 <a:prstGeom prst="rect">
                   <a:avLst/>
@@ -4628,8 +4628,8 @@
               </p:nvSpPr>
               <p:spPr>
                 <a:xfrm>
-                  <a:off x="8381" y="2913"/>
-                  <a:ext cx="3341" cy="330"/>
+                  <a:off x="8381" y="2921"/>
+                  <a:ext cx="3341" cy="314"/>
                 </a:xfrm>
                 <a:prstGeom prst="rect">
                   <a:avLst/>
@@ -4814,8 +4814,8 @@
             </p:nvSpPr>
             <p:spPr>
               <a:xfrm>
-                <a:off x="1152" y="4756"/>
-                <a:ext cx="634" cy="238"/>
+                <a:off x="1152" y="4762"/>
+                <a:ext cx="634" cy="226"/>
               </a:xfrm>
               <a:prstGeom prst="rect">
                 <a:avLst/>
@@ -4855,8 +4855,8 @@
             </p:nvSpPr>
             <p:spPr>
               <a:xfrm>
-                <a:off x="1958" y="4585"/>
-                <a:ext cx="1334" cy="363"/>
+                <a:off x="1958" y="4594"/>
+                <a:ext cx="1334" cy="345"/>
               </a:xfrm>
               <a:prstGeom prst="rect">
                 <a:avLst/>
@@ -4897,7 +4897,7 @@
             <p:spPr>
               <a:xfrm>
                 <a:off x="1958" y="5098"/>
-                <a:ext cx="1334" cy="465"/>
+                <a:ext cx="1334" cy="664"/>
               </a:xfrm>
               <a:prstGeom prst="rect">
                 <a:avLst/>
@@ -5058,8 +5058,8 @@
             </p:nvSpPr>
             <p:spPr>
               <a:xfrm>
-                <a:off x="4752" y="4756"/>
-                <a:ext cx="634" cy="238"/>
+                <a:off x="4752" y="4762"/>
+                <a:ext cx="634" cy="226"/>
               </a:xfrm>
               <a:prstGeom prst="rect">
                 <a:avLst/>
@@ -5099,8 +5099,8 @@
             </p:nvSpPr>
             <p:spPr>
               <a:xfrm>
-                <a:off x="5558" y="4585"/>
-                <a:ext cx="2333" cy="363"/>
+                <a:off x="5558" y="4594"/>
+                <a:ext cx="2333" cy="345"/>
               </a:xfrm>
               <a:prstGeom prst="rect">
                 <a:avLst/>
@@ -5141,7 +5141,7 @@
             <p:spPr>
               <a:xfrm>
                 <a:off x="5558" y="5097"/>
-                <a:ext cx="2333" cy="465"/>
+                <a:ext cx="2333" cy="443"/>
               </a:xfrm>
               <a:prstGeom prst="rect">
                 <a:avLst/>
@@ -5284,8 +5284,8 @@
             </p:nvSpPr>
             <p:spPr>
               <a:xfrm>
-                <a:off x="8813" y="4756"/>
-                <a:ext cx="634" cy="238"/>
+                <a:off x="8813" y="4762"/>
+                <a:ext cx="634" cy="226"/>
               </a:xfrm>
               <a:prstGeom prst="rect">
                 <a:avLst/>
@@ -5325,8 +5325,8 @@
             </p:nvSpPr>
             <p:spPr>
               <a:xfrm>
-                <a:off x="9619" y="4585"/>
-                <a:ext cx="2305" cy="363"/>
+                <a:off x="9619" y="4594"/>
+                <a:ext cx="2305" cy="345"/>
               </a:xfrm>
               <a:prstGeom prst="rect">
                 <a:avLst/>
@@ -5367,7 +5367,7 @@
             <p:spPr>
               <a:xfrm>
                 <a:off x="9619" y="5097"/>
-                <a:ext cx="2305" cy="232"/>
+                <a:ext cx="2305" cy="443"/>
               </a:xfrm>
               <a:prstGeom prst="rect">
                 <a:avLst/>
@@ -5510,8 +5510,8 @@
             </p:nvSpPr>
             <p:spPr>
               <a:xfrm>
-                <a:off x="12816" y="4755"/>
-                <a:ext cx="634" cy="238"/>
+                <a:off x="12816" y="4761"/>
+                <a:ext cx="634" cy="226"/>
               </a:xfrm>
               <a:prstGeom prst="rect">
                 <a:avLst/>
@@ -5551,8 +5551,8 @@
             </p:nvSpPr>
             <p:spPr>
               <a:xfrm>
-                <a:off x="13622" y="4586"/>
-                <a:ext cx="2678" cy="363"/>
+                <a:off x="13622" y="4595"/>
+                <a:ext cx="2678" cy="345"/>
               </a:xfrm>
               <a:prstGeom prst="rect">
                 <a:avLst/>
@@ -5593,7 +5593,7 @@
             <p:spPr>
               <a:xfrm>
                 <a:off x="13622" y="5098"/>
-                <a:ext cx="2678" cy="465"/>
+                <a:ext cx="2678" cy="443"/>
               </a:xfrm>
               <a:prstGeom prst="rect">
                 <a:avLst/>
@@ -5754,8 +5754,8 @@
             </p:nvSpPr>
             <p:spPr>
               <a:xfrm>
-                <a:off x="4752" y="7665"/>
-                <a:ext cx="634" cy="238"/>
+                <a:off x="4752" y="7671"/>
+                <a:ext cx="634" cy="226"/>
               </a:xfrm>
               <a:prstGeom prst="rect">
                 <a:avLst/>
@@ -5795,8 +5795,8 @@
             </p:nvSpPr>
             <p:spPr>
               <a:xfrm>
-                <a:off x="5558" y="7507"/>
-                <a:ext cx="2333" cy="338"/>
+                <a:off x="5558" y="7515"/>
+                <a:ext cx="2333" cy="322"/>
               </a:xfrm>
               <a:prstGeom prst="rect">
                 <a:avLst/>
@@ -5837,7 +5837,7 @@
             <p:spPr>
               <a:xfrm>
                 <a:off x="5558" y="8007"/>
-                <a:ext cx="2333" cy="232"/>
+                <a:ext cx="2333" cy="443"/>
               </a:xfrm>
               <a:prstGeom prst="rect">
                 <a:avLst/>
@@ -5980,8 +5980,8 @@
             </p:nvSpPr>
             <p:spPr>
               <a:xfrm>
-                <a:off x="8813" y="7665"/>
-                <a:ext cx="634" cy="238"/>
+                <a:off x="8813" y="7671"/>
+                <a:ext cx="634" cy="226"/>
               </a:xfrm>
               <a:prstGeom prst="rect">
                 <a:avLst/>
@@ -6021,8 +6021,8 @@
             </p:nvSpPr>
             <p:spPr>
               <a:xfrm>
-                <a:off x="9619" y="7507"/>
-                <a:ext cx="2305" cy="338"/>
+                <a:off x="9619" y="7515"/>
+                <a:ext cx="2305" cy="322"/>
               </a:xfrm>
               <a:prstGeom prst="rect">
                 <a:avLst/>
@@ -6063,7 +6063,7 @@
             <p:spPr>
               <a:xfrm>
                 <a:off x="9619" y="8007"/>
-                <a:ext cx="2305" cy="232"/>
+                <a:ext cx="2305" cy="664"/>
               </a:xfrm>
               <a:prstGeom prst="rect">
                 <a:avLst/>
@@ -6206,8 +6206,8 @@
             </p:nvSpPr>
             <p:spPr>
               <a:xfrm>
-                <a:off x="12816" y="7665"/>
-                <a:ext cx="634" cy="238"/>
+                <a:off x="12816" y="7671"/>
+                <a:ext cx="634" cy="226"/>
               </a:xfrm>
               <a:prstGeom prst="rect">
                 <a:avLst/>
@@ -6247,8 +6247,8 @@
             </p:nvSpPr>
             <p:spPr>
               <a:xfrm>
-                <a:off x="13623" y="7507"/>
-                <a:ext cx="2679" cy="338"/>
+                <a:off x="13623" y="7515"/>
+                <a:ext cx="2679" cy="322"/>
               </a:xfrm>
               <a:prstGeom prst="rect">
                 <a:avLst/>
@@ -6289,7 +6289,7 @@
             <p:spPr>
               <a:xfrm>
                 <a:off x="13623" y="8007"/>
-                <a:ext cx="2680" cy="232"/>
+                <a:ext cx="2680" cy="221"/>
               </a:xfrm>
               <a:prstGeom prst="rect">
                 <a:avLst/>
@@ -6741,12 +6741,109 @@
           </p:style>
         </p:cxnSp>
       </p:grpSp>
+      <p:sp>
+        <p:nvSpPr>
+          <p:cNvPr id="7" name="Title 6"/>
+          <p:cNvSpPr txBox="1">
+            <a:spLocks noGrp="1"/>
+          </p:cNvSpPr>
+          <p:nvPr>
+            <p:custDataLst>
+              <p:tags r:id="rId1"/>
+            </p:custDataLst>
+          </p:nvPr>
+        </p:nvSpPr>
+        <p:spPr>
+          <a:xfrm>
+            <a:off x="105410" y="129540"/>
+            <a:ext cx="10064115" cy="640080"/>
+          </a:xfrm>
+          <a:prstGeom prst="rect">
+            <a:avLst/>
+          </a:prstGeom>
+          <a:noFill/>
+          <a:ln>
+            <a:noFill/>
+            <a:prstDash val="sysDash"/>
+          </a:ln>
+        </p:spPr>
+        <p:txBody>
+          <a:bodyPr vert="horz" wrap="square" lIns="91440" tIns="45720" rIns="91440" bIns="45720" rtlCol="0" anchor="ctr">
+            <a:normAutofit fontScale="80000"/>
+          </a:bodyPr>
+          <a:lstStyle>
+            <a:lvl1pPr marL="0" marR="0" lvl="0" algn="l" defTabSz="914400" rtl="0" eaLnBrk="1" fontAlgn="auto" latinLnBrk="0" hangingPunct="1">
+              <a:lnSpc>
+                <a:spcPct val="100000"/>
+              </a:lnSpc>
+              <a:buClrTx/>
+              <a:buSzTx/>
+              <a:buFontTx/>
+              <a:buNone/>
+              <a:defRPr kumimoji="0" lang="en-US" sz="4320" b="1" i="0" u="none" strike="noStrike" kern="1200" cap="none" spc="0" normalizeH="0" baseline="0" noProof="1" dirty="0">
+                <a:ln>
+                  <a:noFill/>
+                  <a:prstDash val="sysDot"/>
+                </a:ln>
+                <a:gradFill>
+                  <a:gsLst>
+                    <a:gs pos="0">
+                      <a:schemeClr val="accent4"/>
+                    </a:gs>
+                    <a:gs pos="100000">
+                      <a:schemeClr val="accent1"/>
+                    </a:gs>
+                  </a:gsLst>
+                  <a:lin ang="4800000" scaled="0"/>
+                </a:gradFill>
+                <a:latin typeface="+mj-lt"/>
+                <a:sym typeface="+mn-ea"/>
+              </a:defRPr>
+            </a:lvl1pPr>
+          </a:lstStyle>
+          <a:p>
+            <a:pPr lvl="0" algn="l"/>
+            <a:r>
+              <a:rPr lang="en-US" altLang="en-US">
+                <a:ea typeface="+mj-ea"/>
+                <a:sym typeface="+mn-ea"/>
+              </a:rPr>
+              <a:t>NETBOX INTEGRATION BLUEPRINT </a:t>
+            </a:r>
+            <a:endParaRPr lang="en-US" altLang="en-US">
+              <a:ea typeface="+mj-ea"/>
+              <a:sym typeface="+mn-ea"/>
+            </a:endParaRPr>
+          </a:p>
+        </p:txBody>
+      </p:sp>
     </p:spTree>
   </p:cSld>
   <p:clrMapOvr>
     <a:masterClrMapping/>
   </p:clrMapOvr>
 </p:sld>
+</file>
+
+<file path=ppt/tags/tag1.xml><?xml version="1.0" encoding="utf-8"?>
+<p:tagLst xmlns:p="http://schemas.openxmlformats.org/presentationml/2006/main">
+  <p:tag name="KSO_WM_UNIT_ISCONTENTSTITLE" val="0"/>
+  <p:tag name="KSO_WM_UNIT_ISNUMDGMTITLE" val="0"/>
+  <p:tag name="KSO_WM_UNIT_PRESET_TEXT" val="正文页-预设标题"/>
+  <p:tag name="KSO_WM_UNIT_NOCLEAR" val="0"/>
+  <p:tag name="KSO_WM_UNIT_VALUE" val="10"/>
+  <p:tag name="KSO_WM_UNIT_HIGHLIGHT" val="0"/>
+  <p:tag name="KSO_WM_UNIT_COMPATIBLE" val="0"/>
+  <p:tag name="KSO_WM_UNIT_DIAGRAM_ISNUMVISUAL" val="0"/>
+  <p:tag name="KSO_WM_UNIT_DIAGRAM_ISREFERUNIT" val="0"/>
+  <p:tag name="KSO_WM_UNIT_CONTENT_GROUP_TYPE" val="titlestyle"/>
+  <p:tag name="KSO_WM_UNIT_TYPE" val="a"/>
+  <p:tag name="KSO_WM_UNIT_INDEX" val="1"/>
+  <p:tag name="KSO_WM_UNIT_ID" val="_7*a*1"/>
+  <p:tag name="KSO_WM_UNIT_LAYERLEVEL" val="1"/>
+  <p:tag name="KSO_WM_TAG_VERSION" val="3.0"/>
+  <p:tag name="KSO_WM_BEAUTIFY_FLAG" val="#wm#"/>
+</p:tagLst>
 </file>
 
 <file path=ppt/theme/theme1.xml><?xml version="1.0" encoding="utf-8"?>
